--- a/更新我心意.pptx
+++ b/更新我心意.pptx
@@ -105,6 +105,22 @@
       </a:defRPr>
     </a:lvl9pPr>
   </p:defaultTextStyle>
+  <p:extLst>
+    <p:ext uri="{EFAFB233-063F-42B5-8137-9DF3F51BA10A}">
+      <p15:sldGuideLst xmlns:p15="http://schemas.microsoft.com/office/powerpoint/2012/main">
+        <p15:guide id="1" orient="horz" pos="2160">
+          <p15:clr>
+            <a:srgbClr val="A4A3A4"/>
+          </p15:clr>
+        </p15:guide>
+        <p15:guide id="2" pos="2880">
+          <p15:clr>
+            <a:srgbClr val="A4A3A4"/>
+          </p15:clr>
+        </p15:guide>
+      </p15:sldGuideLst>
+    </p:ext>
+  </p:extLst>
 </p:presentation>
 </file>
 
@@ -146,10 +162,9 @@
           <a:lstStyle/>
           <a:p>
             <a:r>
-              <a:rPr lang="zh-TW" altLang="en-US" smtClean="0"/>
+              <a:rPr lang="zh-TW" altLang="en-US"/>
               <a:t>按一下以編輯母片標題樣式</a:t>
             </a:r>
-            <a:endParaRPr lang="zh-TW" altLang="en-US"/>
           </a:p>
         </p:txBody>
       </p:sp>
@@ -265,10 +280,9 @@
           </a:lstStyle>
           <a:p>
             <a:r>
-              <a:rPr lang="zh-TW" altLang="en-US" smtClean="0"/>
+              <a:rPr lang="zh-TW" altLang="en-US"/>
               <a:t>按一下以編輯母片副標題樣式</a:t>
             </a:r>
-            <a:endParaRPr lang="zh-TW" altLang="en-US"/>
           </a:p>
         </p:txBody>
       </p:sp>
@@ -290,7 +304,7 @@
             <a:fld id="{79D6D643-D4CE-4B27-BB92-5E81FA880EC4}" type="datetimeFigureOut">
               <a:rPr lang="zh-TW" altLang="en-US" smtClean="0"/>
               <a:pPr/>
-              <a:t>2018/9/1</a:t>
+              <a:t>2026/2/16</a:t>
             </a:fld>
             <a:endParaRPr lang="zh-TW" altLang="en-US"/>
           </a:p>
@@ -380,10 +394,9 @@
           <a:lstStyle/>
           <a:p>
             <a:r>
-              <a:rPr lang="zh-TW" altLang="en-US" smtClean="0"/>
+              <a:rPr lang="zh-TW" altLang="en-US"/>
               <a:t>按一下以編輯母片標題樣式</a:t>
             </a:r>
-            <a:endParaRPr lang="zh-TW" altLang="en-US"/>
           </a:p>
         </p:txBody>
       </p:sp>
@@ -404,38 +417,37 @@
           <a:p>
             <a:pPr lvl="0"/>
             <a:r>
-              <a:rPr lang="zh-TW" altLang="en-US" smtClean="0"/>
+              <a:rPr lang="zh-TW" altLang="en-US"/>
               <a:t>按一下以編輯母片文字樣式</a:t>
             </a:r>
           </a:p>
           <a:p>
             <a:pPr lvl="1"/>
             <a:r>
-              <a:rPr lang="zh-TW" altLang="en-US" smtClean="0"/>
+              <a:rPr lang="zh-TW" altLang="en-US"/>
               <a:t>第二層</a:t>
             </a:r>
           </a:p>
           <a:p>
             <a:pPr lvl="2"/>
             <a:r>
-              <a:rPr lang="zh-TW" altLang="en-US" smtClean="0"/>
+              <a:rPr lang="zh-TW" altLang="en-US"/>
               <a:t>第三層</a:t>
             </a:r>
           </a:p>
           <a:p>
             <a:pPr lvl="3"/>
             <a:r>
-              <a:rPr lang="zh-TW" altLang="en-US" smtClean="0"/>
+              <a:rPr lang="zh-TW" altLang="en-US"/>
               <a:t>第四層</a:t>
             </a:r>
           </a:p>
           <a:p>
             <a:pPr lvl="4"/>
             <a:r>
-              <a:rPr lang="zh-TW" altLang="en-US" smtClean="0"/>
+              <a:rPr lang="zh-TW" altLang="en-US"/>
               <a:t>第五層</a:t>
             </a:r>
-            <a:endParaRPr lang="zh-TW" altLang="en-US"/>
           </a:p>
         </p:txBody>
       </p:sp>
@@ -457,7 +469,7 @@
             <a:fld id="{79D6D643-D4CE-4B27-BB92-5E81FA880EC4}" type="datetimeFigureOut">
               <a:rPr lang="zh-TW" altLang="en-US" smtClean="0"/>
               <a:pPr/>
-              <a:t>2018/9/1</a:t>
+              <a:t>2026/2/16</a:t>
             </a:fld>
             <a:endParaRPr lang="zh-TW" altLang="en-US"/>
           </a:p>
@@ -552,10 +564,9 @@
           <a:lstStyle/>
           <a:p>
             <a:r>
-              <a:rPr lang="zh-TW" altLang="en-US" smtClean="0"/>
+              <a:rPr lang="zh-TW" altLang="en-US"/>
               <a:t>按一下以編輯母片標題樣式</a:t>
             </a:r>
-            <a:endParaRPr lang="zh-TW" altLang="en-US"/>
           </a:p>
         </p:txBody>
       </p:sp>
@@ -581,38 +592,37 @@
           <a:p>
             <a:pPr lvl="0"/>
             <a:r>
-              <a:rPr lang="zh-TW" altLang="en-US" smtClean="0"/>
+              <a:rPr lang="zh-TW" altLang="en-US"/>
               <a:t>按一下以編輯母片文字樣式</a:t>
             </a:r>
           </a:p>
           <a:p>
             <a:pPr lvl="1"/>
             <a:r>
-              <a:rPr lang="zh-TW" altLang="en-US" smtClean="0"/>
+              <a:rPr lang="zh-TW" altLang="en-US"/>
               <a:t>第二層</a:t>
             </a:r>
           </a:p>
           <a:p>
             <a:pPr lvl="2"/>
             <a:r>
-              <a:rPr lang="zh-TW" altLang="en-US" smtClean="0"/>
+              <a:rPr lang="zh-TW" altLang="en-US"/>
               <a:t>第三層</a:t>
             </a:r>
           </a:p>
           <a:p>
             <a:pPr lvl="3"/>
             <a:r>
-              <a:rPr lang="zh-TW" altLang="en-US" smtClean="0"/>
+              <a:rPr lang="zh-TW" altLang="en-US"/>
               <a:t>第四層</a:t>
             </a:r>
           </a:p>
           <a:p>
             <a:pPr lvl="4"/>
             <a:r>
-              <a:rPr lang="zh-TW" altLang="en-US" smtClean="0"/>
+              <a:rPr lang="zh-TW" altLang="en-US"/>
               <a:t>第五層</a:t>
             </a:r>
-            <a:endParaRPr lang="zh-TW" altLang="en-US"/>
           </a:p>
         </p:txBody>
       </p:sp>
@@ -634,7 +644,7 @@
             <a:fld id="{79D6D643-D4CE-4B27-BB92-5E81FA880EC4}" type="datetimeFigureOut">
               <a:rPr lang="zh-TW" altLang="en-US" smtClean="0"/>
               <a:pPr/>
-              <a:t>2018/9/1</a:t>
+              <a:t>2026/2/16</a:t>
             </a:fld>
             <a:endParaRPr lang="zh-TW" altLang="en-US"/>
           </a:p>
@@ -724,10 +734,9 @@
           <a:lstStyle/>
           <a:p>
             <a:r>
-              <a:rPr lang="zh-TW" altLang="en-US" smtClean="0"/>
+              <a:rPr lang="zh-TW" altLang="en-US"/>
               <a:t>按一下以編輯母片標題樣式</a:t>
             </a:r>
-            <a:endParaRPr lang="zh-TW" altLang="en-US"/>
           </a:p>
         </p:txBody>
       </p:sp>
@@ -748,38 +757,37 @@
           <a:p>
             <a:pPr lvl="0"/>
             <a:r>
-              <a:rPr lang="zh-TW" altLang="en-US" smtClean="0"/>
+              <a:rPr lang="zh-TW" altLang="en-US"/>
               <a:t>按一下以編輯母片文字樣式</a:t>
             </a:r>
           </a:p>
           <a:p>
             <a:pPr lvl="1"/>
             <a:r>
-              <a:rPr lang="zh-TW" altLang="en-US" smtClean="0"/>
+              <a:rPr lang="zh-TW" altLang="en-US"/>
               <a:t>第二層</a:t>
             </a:r>
           </a:p>
           <a:p>
             <a:pPr lvl="2"/>
             <a:r>
-              <a:rPr lang="zh-TW" altLang="en-US" smtClean="0"/>
+              <a:rPr lang="zh-TW" altLang="en-US"/>
               <a:t>第三層</a:t>
             </a:r>
           </a:p>
           <a:p>
             <a:pPr lvl="3"/>
             <a:r>
-              <a:rPr lang="zh-TW" altLang="en-US" smtClean="0"/>
+              <a:rPr lang="zh-TW" altLang="en-US"/>
               <a:t>第四層</a:t>
             </a:r>
           </a:p>
           <a:p>
             <a:pPr lvl="4"/>
             <a:r>
-              <a:rPr lang="zh-TW" altLang="en-US" smtClean="0"/>
+              <a:rPr lang="zh-TW" altLang="en-US"/>
               <a:t>第五層</a:t>
             </a:r>
-            <a:endParaRPr lang="zh-TW" altLang="en-US"/>
           </a:p>
         </p:txBody>
       </p:sp>
@@ -801,7 +809,7 @@
             <a:fld id="{79D6D643-D4CE-4B27-BB92-5E81FA880EC4}" type="datetimeFigureOut">
               <a:rPr lang="zh-TW" altLang="en-US" smtClean="0"/>
               <a:pPr/>
-              <a:t>2018/9/1</a:t>
+              <a:t>2026/2/16</a:t>
             </a:fld>
             <a:endParaRPr lang="zh-TW" altLang="en-US"/>
           </a:p>
@@ -900,10 +908,9 @@
           </a:lstStyle>
           <a:p>
             <a:r>
-              <a:rPr lang="zh-TW" altLang="en-US" smtClean="0"/>
+              <a:rPr lang="zh-TW" altLang="en-US"/>
               <a:t>按一下以編輯母片標題樣式</a:t>
             </a:r>
-            <a:endParaRPr lang="zh-TW" altLang="en-US"/>
           </a:p>
         </p:txBody>
       </p:sp>
@@ -1020,7 +1027,7 @@
           <a:p>
             <a:pPr lvl="0"/>
             <a:r>
-              <a:rPr lang="zh-TW" altLang="en-US" smtClean="0"/>
+              <a:rPr lang="zh-TW" altLang="en-US"/>
               <a:t>按一下以編輯母片文字樣式</a:t>
             </a:r>
           </a:p>
@@ -1044,7 +1051,7 @@
             <a:fld id="{79D6D643-D4CE-4B27-BB92-5E81FA880EC4}" type="datetimeFigureOut">
               <a:rPr lang="zh-TW" altLang="en-US" smtClean="0"/>
               <a:pPr/>
-              <a:t>2018/9/1</a:t>
+              <a:t>2026/2/16</a:t>
             </a:fld>
             <a:endParaRPr lang="zh-TW" altLang="en-US"/>
           </a:p>
@@ -1134,10 +1141,9 @@
           <a:lstStyle/>
           <a:p>
             <a:r>
-              <a:rPr lang="zh-TW" altLang="en-US" smtClean="0"/>
+              <a:rPr lang="zh-TW" altLang="en-US"/>
               <a:t>按一下以編輯母片標題樣式</a:t>
             </a:r>
-            <a:endParaRPr lang="zh-TW" altLang="en-US"/>
           </a:p>
         </p:txBody>
       </p:sp>
@@ -1191,38 +1197,37 @@
           <a:p>
             <a:pPr lvl="0"/>
             <a:r>
-              <a:rPr lang="zh-TW" altLang="en-US" smtClean="0"/>
+              <a:rPr lang="zh-TW" altLang="en-US"/>
               <a:t>按一下以編輯母片文字樣式</a:t>
             </a:r>
           </a:p>
           <a:p>
             <a:pPr lvl="1"/>
             <a:r>
-              <a:rPr lang="zh-TW" altLang="en-US" smtClean="0"/>
+              <a:rPr lang="zh-TW" altLang="en-US"/>
               <a:t>第二層</a:t>
             </a:r>
           </a:p>
           <a:p>
             <a:pPr lvl="2"/>
             <a:r>
-              <a:rPr lang="zh-TW" altLang="en-US" smtClean="0"/>
+              <a:rPr lang="zh-TW" altLang="en-US"/>
               <a:t>第三層</a:t>
             </a:r>
           </a:p>
           <a:p>
             <a:pPr lvl="3"/>
             <a:r>
-              <a:rPr lang="zh-TW" altLang="en-US" smtClean="0"/>
+              <a:rPr lang="zh-TW" altLang="en-US"/>
               <a:t>第四層</a:t>
             </a:r>
           </a:p>
           <a:p>
             <a:pPr lvl="4"/>
             <a:r>
-              <a:rPr lang="zh-TW" altLang="en-US" smtClean="0"/>
+              <a:rPr lang="zh-TW" altLang="en-US"/>
               <a:t>第五層</a:t>
             </a:r>
-            <a:endParaRPr lang="zh-TW" altLang="en-US"/>
           </a:p>
         </p:txBody>
       </p:sp>
@@ -1276,38 +1281,37 @@
           <a:p>
             <a:pPr lvl="0"/>
             <a:r>
-              <a:rPr lang="zh-TW" altLang="en-US" smtClean="0"/>
+              <a:rPr lang="zh-TW" altLang="en-US"/>
               <a:t>按一下以編輯母片文字樣式</a:t>
             </a:r>
           </a:p>
           <a:p>
             <a:pPr lvl="1"/>
             <a:r>
-              <a:rPr lang="zh-TW" altLang="en-US" smtClean="0"/>
+              <a:rPr lang="zh-TW" altLang="en-US"/>
               <a:t>第二層</a:t>
             </a:r>
           </a:p>
           <a:p>
             <a:pPr lvl="2"/>
             <a:r>
-              <a:rPr lang="zh-TW" altLang="en-US" smtClean="0"/>
+              <a:rPr lang="zh-TW" altLang="en-US"/>
               <a:t>第三層</a:t>
             </a:r>
           </a:p>
           <a:p>
             <a:pPr lvl="3"/>
             <a:r>
-              <a:rPr lang="zh-TW" altLang="en-US" smtClean="0"/>
+              <a:rPr lang="zh-TW" altLang="en-US"/>
               <a:t>第四層</a:t>
             </a:r>
           </a:p>
           <a:p>
             <a:pPr lvl="4"/>
             <a:r>
-              <a:rPr lang="zh-TW" altLang="en-US" smtClean="0"/>
+              <a:rPr lang="zh-TW" altLang="en-US"/>
               <a:t>第五層</a:t>
             </a:r>
-            <a:endParaRPr lang="zh-TW" altLang="en-US"/>
           </a:p>
         </p:txBody>
       </p:sp>
@@ -1329,7 +1333,7 @@
             <a:fld id="{79D6D643-D4CE-4B27-BB92-5E81FA880EC4}" type="datetimeFigureOut">
               <a:rPr lang="zh-TW" altLang="en-US" smtClean="0"/>
               <a:pPr/>
-              <a:t>2018/9/1</a:t>
+              <a:t>2026/2/16</a:t>
             </a:fld>
             <a:endParaRPr lang="zh-TW" altLang="en-US"/>
           </a:p>
@@ -1423,10 +1427,9 @@
           </a:lstStyle>
           <a:p>
             <a:r>
-              <a:rPr lang="zh-TW" altLang="en-US" smtClean="0"/>
+              <a:rPr lang="zh-TW" altLang="en-US"/>
               <a:t>按一下以編輯母片標題樣式</a:t>
             </a:r>
-            <a:endParaRPr lang="zh-TW" altLang="en-US"/>
           </a:p>
         </p:txBody>
       </p:sp>
@@ -1489,7 +1492,7 @@
           <a:p>
             <a:pPr lvl="0"/>
             <a:r>
-              <a:rPr lang="zh-TW" altLang="en-US" smtClean="0"/>
+              <a:rPr lang="zh-TW" altLang="en-US"/>
               <a:t>按一下以編輯母片文字樣式</a:t>
             </a:r>
           </a:p>
@@ -1545,38 +1548,37 @@
           <a:p>
             <a:pPr lvl="0"/>
             <a:r>
-              <a:rPr lang="zh-TW" altLang="en-US" smtClean="0"/>
+              <a:rPr lang="zh-TW" altLang="en-US"/>
               <a:t>按一下以編輯母片文字樣式</a:t>
             </a:r>
           </a:p>
           <a:p>
             <a:pPr lvl="1"/>
             <a:r>
-              <a:rPr lang="zh-TW" altLang="en-US" smtClean="0"/>
+              <a:rPr lang="zh-TW" altLang="en-US"/>
               <a:t>第二層</a:t>
             </a:r>
           </a:p>
           <a:p>
             <a:pPr lvl="2"/>
             <a:r>
-              <a:rPr lang="zh-TW" altLang="en-US" smtClean="0"/>
+              <a:rPr lang="zh-TW" altLang="en-US"/>
               <a:t>第三層</a:t>
             </a:r>
           </a:p>
           <a:p>
             <a:pPr lvl="3"/>
             <a:r>
-              <a:rPr lang="zh-TW" altLang="en-US" smtClean="0"/>
+              <a:rPr lang="zh-TW" altLang="en-US"/>
               <a:t>第四層</a:t>
             </a:r>
           </a:p>
           <a:p>
             <a:pPr lvl="4"/>
             <a:r>
-              <a:rPr lang="zh-TW" altLang="en-US" smtClean="0"/>
+              <a:rPr lang="zh-TW" altLang="en-US"/>
               <a:t>第五層</a:t>
             </a:r>
-            <a:endParaRPr lang="zh-TW" altLang="en-US"/>
           </a:p>
         </p:txBody>
       </p:sp>
@@ -1639,7 +1641,7 @@
           <a:p>
             <a:pPr lvl="0"/>
             <a:r>
-              <a:rPr lang="zh-TW" altLang="en-US" smtClean="0"/>
+              <a:rPr lang="zh-TW" altLang="en-US"/>
               <a:t>按一下以編輯母片文字樣式</a:t>
             </a:r>
           </a:p>
@@ -1695,38 +1697,37 @@
           <a:p>
             <a:pPr lvl="0"/>
             <a:r>
-              <a:rPr lang="zh-TW" altLang="en-US" smtClean="0"/>
+              <a:rPr lang="zh-TW" altLang="en-US"/>
               <a:t>按一下以編輯母片文字樣式</a:t>
             </a:r>
           </a:p>
           <a:p>
             <a:pPr lvl="1"/>
             <a:r>
-              <a:rPr lang="zh-TW" altLang="en-US" smtClean="0"/>
+              <a:rPr lang="zh-TW" altLang="en-US"/>
               <a:t>第二層</a:t>
             </a:r>
           </a:p>
           <a:p>
             <a:pPr lvl="2"/>
             <a:r>
-              <a:rPr lang="zh-TW" altLang="en-US" smtClean="0"/>
+              <a:rPr lang="zh-TW" altLang="en-US"/>
               <a:t>第三層</a:t>
             </a:r>
           </a:p>
           <a:p>
             <a:pPr lvl="3"/>
             <a:r>
-              <a:rPr lang="zh-TW" altLang="en-US" smtClean="0"/>
+              <a:rPr lang="zh-TW" altLang="en-US"/>
               <a:t>第四層</a:t>
             </a:r>
           </a:p>
           <a:p>
             <a:pPr lvl="4"/>
             <a:r>
-              <a:rPr lang="zh-TW" altLang="en-US" smtClean="0"/>
+              <a:rPr lang="zh-TW" altLang="en-US"/>
               <a:t>第五層</a:t>
             </a:r>
-            <a:endParaRPr lang="zh-TW" altLang="en-US"/>
           </a:p>
         </p:txBody>
       </p:sp>
@@ -1748,7 +1749,7 @@
             <a:fld id="{79D6D643-D4CE-4B27-BB92-5E81FA880EC4}" type="datetimeFigureOut">
               <a:rPr lang="zh-TW" altLang="en-US" smtClean="0"/>
               <a:pPr/>
-              <a:t>2018/9/1</a:t>
+              <a:t>2026/2/16</a:t>
             </a:fld>
             <a:endParaRPr lang="zh-TW" altLang="en-US"/>
           </a:p>
@@ -1838,10 +1839,9 @@
           <a:lstStyle/>
           <a:p>
             <a:r>
-              <a:rPr lang="zh-TW" altLang="en-US" smtClean="0"/>
+              <a:rPr lang="zh-TW" altLang="en-US"/>
               <a:t>按一下以編輯母片標題樣式</a:t>
             </a:r>
-            <a:endParaRPr lang="zh-TW" altLang="en-US"/>
           </a:p>
         </p:txBody>
       </p:sp>
@@ -1863,7 +1863,7 @@
             <a:fld id="{79D6D643-D4CE-4B27-BB92-5E81FA880EC4}" type="datetimeFigureOut">
               <a:rPr lang="zh-TW" altLang="en-US" smtClean="0"/>
               <a:pPr/>
-              <a:t>2018/9/1</a:t>
+              <a:t>2026/2/16</a:t>
             </a:fld>
             <a:endParaRPr lang="zh-TW" altLang="en-US"/>
           </a:p>
@@ -1955,7 +1955,7 @@
             <a:fld id="{79D6D643-D4CE-4B27-BB92-5E81FA880EC4}" type="datetimeFigureOut">
               <a:rPr lang="zh-TW" altLang="en-US" smtClean="0"/>
               <a:pPr/>
-              <a:t>2018/9/1</a:t>
+              <a:t>2026/2/16</a:t>
             </a:fld>
             <a:endParaRPr lang="zh-TW" altLang="en-US"/>
           </a:p>
@@ -2054,10 +2054,9 @@
           </a:lstStyle>
           <a:p>
             <a:r>
-              <a:rPr lang="zh-TW" altLang="en-US" smtClean="0"/>
+              <a:rPr lang="zh-TW" altLang="en-US"/>
               <a:t>按一下以編輯母片標題樣式</a:t>
             </a:r>
-            <a:endParaRPr lang="zh-TW" altLang="en-US"/>
           </a:p>
         </p:txBody>
       </p:sp>
@@ -2111,38 +2110,37 @@
           <a:p>
             <a:pPr lvl="0"/>
             <a:r>
-              <a:rPr lang="zh-TW" altLang="en-US" smtClean="0"/>
+              <a:rPr lang="zh-TW" altLang="en-US"/>
               <a:t>按一下以編輯母片文字樣式</a:t>
             </a:r>
           </a:p>
           <a:p>
             <a:pPr lvl="1"/>
             <a:r>
-              <a:rPr lang="zh-TW" altLang="en-US" smtClean="0"/>
+              <a:rPr lang="zh-TW" altLang="en-US"/>
               <a:t>第二層</a:t>
             </a:r>
           </a:p>
           <a:p>
             <a:pPr lvl="2"/>
             <a:r>
-              <a:rPr lang="zh-TW" altLang="en-US" smtClean="0"/>
+              <a:rPr lang="zh-TW" altLang="en-US"/>
               <a:t>第三層</a:t>
             </a:r>
           </a:p>
           <a:p>
             <a:pPr lvl="3"/>
             <a:r>
-              <a:rPr lang="zh-TW" altLang="en-US" smtClean="0"/>
+              <a:rPr lang="zh-TW" altLang="en-US"/>
               <a:t>第四層</a:t>
             </a:r>
           </a:p>
           <a:p>
             <a:pPr lvl="4"/>
             <a:r>
-              <a:rPr lang="zh-TW" altLang="en-US" smtClean="0"/>
+              <a:rPr lang="zh-TW" altLang="en-US"/>
               <a:t>第五層</a:t>
             </a:r>
-            <a:endParaRPr lang="zh-TW" altLang="en-US"/>
           </a:p>
         </p:txBody>
       </p:sp>
@@ -2205,7 +2203,7 @@
           <a:p>
             <a:pPr lvl="0"/>
             <a:r>
-              <a:rPr lang="zh-TW" altLang="en-US" smtClean="0"/>
+              <a:rPr lang="zh-TW" altLang="en-US"/>
               <a:t>按一下以編輯母片文字樣式</a:t>
             </a:r>
           </a:p>
@@ -2229,7 +2227,7 @@
             <a:fld id="{79D6D643-D4CE-4B27-BB92-5E81FA880EC4}" type="datetimeFigureOut">
               <a:rPr lang="zh-TW" altLang="en-US" smtClean="0"/>
               <a:pPr/>
-              <a:t>2018/9/1</a:t>
+              <a:t>2026/2/16</a:t>
             </a:fld>
             <a:endParaRPr lang="zh-TW" altLang="en-US"/>
           </a:p>
@@ -2328,10 +2326,9 @@
           </a:lstStyle>
           <a:p>
             <a:r>
-              <a:rPr lang="zh-TW" altLang="en-US" smtClean="0"/>
+              <a:rPr lang="zh-TW" altLang="en-US"/>
               <a:t>按一下以編輯母片標題樣式</a:t>
             </a:r>
-            <a:endParaRPr lang="zh-TW" altLang="en-US"/>
           </a:p>
         </p:txBody>
       </p:sp>
@@ -2393,10 +2390,9 @@
           </a:lstStyle>
           <a:p>
             <a:r>
-              <a:rPr lang="zh-TW" altLang="en-US" smtClean="0"/>
+              <a:rPr lang="zh-TW" altLang="en-US"/>
               <a:t>按一下圖示以新增圖片</a:t>
             </a:r>
-            <a:endParaRPr lang="zh-TW" altLang="en-US"/>
           </a:p>
         </p:txBody>
       </p:sp>
@@ -2459,7 +2455,7 @@
           <a:p>
             <a:pPr lvl="0"/>
             <a:r>
-              <a:rPr lang="zh-TW" altLang="en-US" smtClean="0"/>
+              <a:rPr lang="zh-TW" altLang="en-US"/>
               <a:t>按一下以編輯母片文字樣式</a:t>
             </a:r>
           </a:p>
@@ -2483,7 +2479,7 @@
             <a:fld id="{79D6D643-D4CE-4B27-BB92-5E81FA880EC4}" type="datetimeFigureOut">
               <a:rPr lang="zh-TW" altLang="en-US" smtClean="0"/>
               <a:pPr/>
-              <a:t>2018/9/1</a:t>
+              <a:t>2026/2/16</a:t>
             </a:fld>
             <a:endParaRPr lang="zh-TW" altLang="en-US"/>
           </a:p>
@@ -2593,10 +2589,9 @@
           <a:lstStyle/>
           <a:p>
             <a:r>
-              <a:rPr lang="zh-TW" altLang="en-US" smtClean="0"/>
+              <a:rPr lang="zh-TW" altLang="en-US"/>
               <a:t>按一下以編輯母片標題樣式</a:t>
             </a:r>
-            <a:endParaRPr lang="zh-TW" altLang="en-US"/>
           </a:p>
         </p:txBody>
       </p:sp>
@@ -2627,38 +2622,37 @@
           <a:p>
             <a:pPr lvl="0"/>
             <a:r>
-              <a:rPr lang="zh-TW" altLang="en-US" smtClean="0"/>
+              <a:rPr lang="zh-TW" altLang="en-US"/>
               <a:t>按一下以編輯母片文字樣式</a:t>
             </a:r>
           </a:p>
           <a:p>
             <a:pPr lvl="1"/>
             <a:r>
-              <a:rPr lang="zh-TW" altLang="en-US" smtClean="0"/>
+              <a:rPr lang="zh-TW" altLang="en-US"/>
               <a:t>第二層</a:t>
             </a:r>
           </a:p>
           <a:p>
             <a:pPr lvl="2"/>
             <a:r>
-              <a:rPr lang="zh-TW" altLang="en-US" smtClean="0"/>
+              <a:rPr lang="zh-TW" altLang="en-US"/>
               <a:t>第三層</a:t>
             </a:r>
           </a:p>
           <a:p>
             <a:pPr lvl="3"/>
             <a:r>
-              <a:rPr lang="zh-TW" altLang="en-US" smtClean="0"/>
+              <a:rPr lang="zh-TW" altLang="en-US"/>
               <a:t>第四層</a:t>
             </a:r>
           </a:p>
           <a:p>
             <a:pPr lvl="4"/>
             <a:r>
-              <a:rPr lang="zh-TW" altLang="en-US" smtClean="0"/>
+              <a:rPr lang="zh-TW" altLang="en-US"/>
               <a:t>第五層</a:t>
             </a:r>
-            <a:endParaRPr lang="zh-TW" altLang="en-US"/>
           </a:p>
         </p:txBody>
       </p:sp>
@@ -2698,7 +2692,7 @@
             <a:fld id="{79D6D643-D4CE-4B27-BB92-5E81FA880EC4}" type="datetimeFigureOut">
               <a:rPr lang="zh-TW" altLang="en-US" smtClean="0"/>
               <a:pPr/>
-              <a:t>2018/9/1</a:t>
+              <a:t>2026/2/16</a:t>
             </a:fld>
             <a:endParaRPr lang="zh-TW" altLang="en-US"/>
           </a:p>
@@ -3085,7 +3079,7 @@
           <a:lstStyle/>
           <a:p>
             <a:r>
-              <a:rPr lang="zh-TW" altLang="en-US" b="1" dirty="0" smtClean="0">
+              <a:rPr lang="zh-TW" altLang="en-US" b="1" dirty="0">
                 <a:solidFill>
                   <a:srgbClr val="000066"/>
                 </a:solidFill>
@@ -3094,13 +3088,6 @@
               </a:rPr>
               <a:t>更新我心意</a:t>
             </a:r>
-            <a:endParaRPr lang="zh-TW" altLang="en-US" b="1" dirty="0">
-              <a:solidFill>
-                <a:srgbClr val="000066"/>
-              </a:solidFill>
-              <a:latin typeface="微軟正黑體" pitchFamily="34" charset="-120"/>
-              <a:ea typeface="微軟正黑體" pitchFamily="34" charset="-120"/>
-            </a:endParaRPr>
           </a:p>
         </p:txBody>
       </p:sp>
@@ -3160,35 +3147,40 @@
               <a:buNone/>
             </a:pPr>
             <a:r>
-              <a:rPr lang="zh-TW" altLang="en-US" sz="5400" b="1" dirty="0" smtClean="0">
+              <a:rPr lang="zh-TW" altLang="en-US" sz="5400" b="1" dirty="0">
                 <a:solidFill>
                   <a:srgbClr val="000066"/>
                 </a:solidFill>
                 <a:latin typeface="微軟正黑體" pitchFamily="34" charset="-120"/>
                 <a:ea typeface="微軟正黑體" pitchFamily="34" charset="-120"/>
               </a:rPr>
-              <a:t>更新</a:t>
-            </a:r>
-            <a:r>
-              <a:rPr lang="zh-TW" altLang="en-US" sz="5400" b="1" dirty="0">
+              <a:t>更新我心意</a:t>
+            </a:r>
+            <a:r>
+              <a:rPr lang="en-US" sz="5400" b="1" dirty="0">
                 <a:solidFill>
                   <a:srgbClr val="000066"/>
                 </a:solidFill>
                 <a:latin typeface="微軟正黑體" pitchFamily="34" charset="-120"/>
                 <a:ea typeface="微軟正黑體" pitchFamily="34" charset="-120"/>
               </a:rPr>
-              <a:t>我心意</a:t>
-            </a:r>
-            <a:r>
-              <a:rPr lang="en-US" sz="5400" b="1" dirty="0">
+              <a:t>   </a:t>
+            </a:r>
+            <a:r>
+              <a:rPr lang="zh-TW" altLang="en-US" sz="5400" b="1" dirty="0">
                 <a:solidFill>
                   <a:srgbClr val="000066"/>
                 </a:solidFill>
                 <a:latin typeface="微軟正黑體" pitchFamily="34" charset="-120"/>
                 <a:ea typeface="微軟正黑體" pitchFamily="34" charset="-120"/>
               </a:rPr>
-              <a:t>   </a:t>
-            </a:r>
+              <a:t>使我能像你</a:t>
+            </a:r>
+          </a:p>
+          <a:p>
+            <a:pPr algn="ctr">
+              <a:buNone/>
+            </a:pPr>
             <a:r>
               <a:rPr lang="zh-TW" altLang="en-US" sz="5400" b="1" dirty="0">
                 <a:solidFill>
@@ -3197,22 +3189,17 @@
                 <a:latin typeface="微軟正黑體" pitchFamily="34" charset="-120"/>
                 <a:ea typeface="微軟正黑體" pitchFamily="34" charset="-120"/>
               </a:rPr>
-              <a:t>使我能像你</a:t>
-            </a:r>
-          </a:p>
-          <a:p>
-            <a:pPr algn="ctr">
-              <a:buNone/>
-            </a:pPr>
-            <a:r>
-              <a:rPr lang="zh-TW" altLang="en-US" sz="5400" b="1" dirty="0" smtClean="0">
+              <a:t>主你是陶匠</a:t>
+            </a:r>
+            <a:r>
+              <a:rPr lang="en-US" sz="5400" b="1" dirty="0">
                 <a:solidFill>
                   <a:srgbClr val="000066"/>
                 </a:solidFill>
                 <a:latin typeface="微軟正黑體" pitchFamily="34" charset="-120"/>
                 <a:ea typeface="微軟正黑體" pitchFamily="34" charset="-120"/>
               </a:rPr>
-              <a:t>主</a:t>
+              <a:t>  </a:t>
             </a:r>
             <a:r>
               <a:rPr lang="zh-TW" altLang="en-US" sz="5400" b="1" dirty="0">
@@ -3222,17 +3209,22 @@
                 <a:latin typeface="微軟正黑體" pitchFamily="34" charset="-120"/>
                 <a:ea typeface="微軟正黑體" pitchFamily="34" charset="-120"/>
               </a:rPr>
-              <a:t>你是陶匠</a:t>
-            </a:r>
-            <a:r>
-              <a:rPr lang="en-US" sz="5400" b="1" dirty="0">
+              <a:t>我是泥土</a:t>
+            </a:r>
+          </a:p>
+          <a:p>
+            <a:pPr algn="ctr">
+              <a:buNone/>
+            </a:pPr>
+            <a:r>
+              <a:rPr lang="zh-CN" altLang="en-US" sz="5400" b="1" dirty="0">
                 <a:solidFill>
                   <a:srgbClr val="000066"/>
                 </a:solidFill>
                 <a:latin typeface="微軟正黑體" pitchFamily="34" charset="-120"/>
                 <a:ea typeface="微軟正黑體" pitchFamily="34" charset="-120"/>
               </a:rPr>
-              <a:t>  </a:t>
+              <a:t>陶</a:t>
             </a:r>
             <a:r>
               <a:rPr lang="zh-TW" altLang="en-US" sz="5400" b="1" dirty="0">
@@ -3242,22 +3234,17 @@
                 <a:latin typeface="微軟正黑體" pitchFamily="34" charset="-120"/>
                 <a:ea typeface="微軟正黑體" pitchFamily="34" charset="-120"/>
               </a:rPr>
-              <a:t>我是泥土</a:t>
-            </a:r>
-          </a:p>
-          <a:p>
-            <a:pPr algn="ctr">
-              <a:buNone/>
-            </a:pPr>
-            <a:r>
-              <a:rPr lang="zh-TW" altLang="en-US" sz="5400" b="1" dirty="0" smtClean="0">
+              <a:t>我塑造我</a:t>
+            </a:r>
+            <a:r>
+              <a:rPr lang="en-US" sz="5400" b="1" dirty="0">
                 <a:solidFill>
                   <a:srgbClr val="000066"/>
                 </a:solidFill>
                 <a:latin typeface="微軟正黑體" pitchFamily="34" charset="-120"/>
                 <a:ea typeface="微軟正黑體" pitchFamily="34" charset="-120"/>
               </a:rPr>
-              <a:t>模</a:t>
+              <a:t>  </a:t>
             </a:r>
             <a:r>
               <a:rPr lang="zh-TW" altLang="en-US" sz="5400" b="1" dirty="0">
@@ -3267,45 +3254,8 @@
                 <a:latin typeface="微軟正黑體" pitchFamily="34" charset="-120"/>
                 <a:ea typeface="微軟正黑體" pitchFamily="34" charset="-120"/>
               </a:rPr>
-              <a:t>我塑造我</a:t>
-            </a:r>
-            <a:r>
-              <a:rPr lang="en-US" sz="5400" b="1" dirty="0">
-                <a:solidFill>
-                  <a:srgbClr val="000066"/>
-                </a:solidFill>
-                <a:latin typeface="微軟正黑體" pitchFamily="34" charset="-120"/>
-                <a:ea typeface="微軟正黑體" pitchFamily="34" charset="-120"/>
-              </a:rPr>
-              <a:t>  </a:t>
-            </a:r>
-            <a:r>
-              <a:rPr lang="zh-TW" altLang="en-US" sz="5400" b="1" dirty="0">
-                <a:solidFill>
-                  <a:srgbClr val="000066"/>
-                </a:solidFill>
-                <a:latin typeface="微軟正黑體" pitchFamily="34" charset="-120"/>
-                <a:ea typeface="微軟正黑體" pitchFamily="34" charset="-120"/>
-              </a:rPr>
-              <a:t>是我的</a:t>
-            </a:r>
-            <a:r>
-              <a:rPr lang="zh-TW" altLang="en-US" sz="5400" b="1" dirty="0" smtClean="0">
-                <a:solidFill>
-                  <a:srgbClr val="000066"/>
-                </a:solidFill>
-                <a:latin typeface="微軟正黑體" pitchFamily="34" charset="-120"/>
-                <a:ea typeface="微軟正黑體" pitchFamily="34" charset="-120"/>
-              </a:rPr>
-              <a:t>懇求</a:t>
-            </a:r>
-            <a:endParaRPr lang="zh-TW" altLang="en-US" sz="5400" b="1" dirty="0">
-              <a:solidFill>
-                <a:srgbClr val="000066"/>
-              </a:solidFill>
-              <a:latin typeface="微軟正黑體" pitchFamily="34" charset="-120"/>
-              <a:ea typeface="微軟正黑體" pitchFamily="34" charset="-120"/>
-            </a:endParaRPr>
+              <a:t>是我的懇求</a:t>
+            </a:r>
           </a:p>
         </p:txBody>
       </p:sp>
@@ -3350,7 +3300,7 @@
           <a:lstStyle/>
           <a:p>
             <a:r>
-              <a:rPr lang="en-US" altLang="zh-TW" b="1" dirty="0" err="1" smtClean="0">
+              <a:rPr lang="en-US" altLang="zh-TW" b="1" dirty="0" err="1">
                 <a:solidFill>
                   <a:srgbClr val="000066"/>
                 </a:solidFill>
@@ -3360,7 +3310,7 @@
               <a:t>Luyện</a:t>
             </a:r>
             <a:r>
-              <a:rPr lang="en-US" altLang="zh-TW" b="1" dirty="0" smtClean="0">
+              <a:rPr lang="en-US" altLang="zh-TW" b="1" dirty="0">
                 <a:solidFill>
                   <a:srgbClr val="000066"/>
                 </a:solidFill>
@@ -3370,7 +3320,7 @@
               <a:t> </a:t>
             </a:r>
             <a:r>
-              <a:rPr lang="en-US" altLang="zh-TW" b="1" dirty="0" err="1" smtClean="0">
+              <a:rPr lang="en-US" altLang="zh-TW" b="1" dirty="0" err="1">
                 <a:solidFill>
                   <a:srgbClr val="000066"/>
                 </a:solidFill>
@@ -3380,7 +3330,7 @@
               <a:t>Lòng</a:t>
             </a:r>
             <a:r>
-              <a:rPr lang="en-US" altLang="zh-TW" b="1" dirty="0" smtClean="0">
+              <a:rPr lang="en-US" altLang="zh-TW" b="1" dirty="0">
                 <a:solidFill>
                   <a:srgbClr val="000066"/>
                 </a:solidFill>
@@ -3423,7 +3373,7 @@
               <a:buNone/>
             </a:pPr>
             <a:r>
-              <a:rPr lang="en-US" altLang="zh-TW" b="1" dirty="0" err="1" smtClean="0">
+              <a:rPr lang="en-US" altLang="zh-TW" b="1" dirty="0" err="1">
                 <a:solidFill>
                   <a:srgbClr val="000066"/>
                 </a:solidFill>
@@ -3433,7 +3383,7 @@
               <a:t>Cầu</a:t>
             </a:r>
             <a:r>
-              <a:rPr lang="en-US" altLang="zh-TW" b="1" dirty="0" smtClean="0">
+              <a:rPr lang="en-US" altLang="zh-TW" b="1" dirty="0">
                 <a:solidFill>
                   <a:srgbClr val="000066"/>
                 </a:solidFill>
@@ -3443,7 +3393,7 @@
               <a:t> </a:t>
             </a:r>
             <a:r>
-              <a:rPr lang="en-US" altLang="zh-TW" b="1" dirty="0" err="1" smtClean="0">
+              <a:rPr lang="en-US" altLang="zh-TW" b="1" dirty="0" err="1">
                 <a:solidFill>
                   <a:srgbClr val="000066"/>
                 </a:solidFill>
@@ -3453,7 +3403,7 @@
               <a:t>xin</a:t>
             </a:r>
             <a:r>
-              <a:rPr lang="en-US" altLang="zh-TW" b="1" dirty="0" smtClean="0">
+              <a:rPr lang="en-US" altLang="zh-TW" b="1" dirty="0">
                 <a:solidFill>
                   <a:srgbClr val="000066"/>
                 </a:solidFill>
@@ -3463,7 +3413,7 @@
               <a:t> Cha </a:t>
             </a:r>
             <a:r>
-              <a:rPr lang="en-US" altLang="zh-TW" b="1" dirty="0" err="1" smtClean="0">
+              <a:rPr lang="en-US" altLang="zh-TW" b="1" dirty="0" err="1">
                 <a:solidFill>
                   <a:srgbClr val="000066"/>
                 </a:solidFill>
@@ -3473,7 +3423,7 @@
               <a:t>đổi</a:t>
             </a:r>
             <a:r>
-              <a:rPr lang="en-US" altLang="zh-TW" b="1" dirty="0" smtClean="0">
+              <a:rPr lang="en-US" altLang="zh-TW" b="1" dirty="0">
                 <a:solidFill>
                   <a:srgbClr val="000066"/>
                 </a:solidFill>
@@ -3483,7 +3433,7 @@
               <a:t> </a:t>
             </a:r>
             <a:r>
-              <a:rPr lang="en-US" altLang="zh-TW" b="1" dirty="0" err="1" smtClean="0">
+              <a:rPr lang="en-US" altLang="zh-TW" b="1" dirty="0" err="1">
                 <a:solidFill>
                   <a:srgbClr val="000066"/>
                 </a:solidFill>
@@ -3493,7 +3443,7 @@
               <a:t>lòng</a:t>
             </a:r>
             <a:r>
-              <a:rPr lang="en-US" altLang="zh-TW" b="1" dirty="0" smtClean="0">
+              <a:rPr lang="en-US" altLang="zh-TW" b="1" dirty="0">
                 <a:solidFill>
                   <a:srgbClr val="000066"/>
                 </a:solidFill>
@@ -3503,7 +3453,7 @@
               <a:t> </a:t>
             </a:r>
             <a:r>
-              <a:rPr lang="en-US" altLang="zh-TW" b="1" dirty="0" err="1" smtClean="0">
+              <a:rPr lang="en-US" altLang="zh-TW" b="1" dirty="0" err="1">
                 <a:solidFill>
                   <a:srgbClr val="000066"/>
                 </a:solidFill>
@@ -3513,7 +3463,7 @@
               <a:t>làm</a:t>
             </a:r>
             <a:r>
-              <a:rPr lang="en-US" altLang="zh-TW" b="1" dirty="0" smtClean="0">
+              <a:rPr lang="en-US" altLang="zh-TW" b="1" dirty="0">
                 <a:solidFill>
                   <a:srgbClr val="000066"/>
                 </a:solidFill>
@@ -3523,7 +3473,7 @@
               <a:t> </a:t>
             </a:r>
             <a:r>
-              <a:rPr lang="en-US" altLang="zh-TW" b="1" dirty="0" err="1" smtClean="0">
+              <a:rPr lang="en-US" altLang="zh-TW" b="1" dirty="0" err="1">
                 <a:solidFill>
                   <a:srgbClr val="000066"/>
                 </a:solidFill>
@@ -3533,7 +3483,7 @@
               <a:t>tâm</a:t>
             </a:r>
             <a:r>
-              <a:rPr lang="en-US" altLang="zh-TW" b="1" dirty="0" smtClean="0">
+              <a:rPr lang="en-US" altLang="zh-TW" b="1" dirty="0">
                 <a:solidFill>
                   <a:srgbClr val="000066"/>
                 </a:solidFill>
@@ -3543,7 +3493,7 @@
               <a:t> </a:t>
             </a:r>
             <a:r>
-              <a:rPr lang="en-US" altLang="zh-TW" b="1" dirty="0" err="1" smtClean="0">
+              <a:rPr lang="en-US" altLang="zh-TW" b="1" dirty="0" err="1">
                 <a:solidFill>
                   <a:srgbClr val="000066"/>
                 </a:solidFill>
@@ -3553,7 +3503,7 @@
               <a:t>linh</a:t>
             </a:r>
             <a:r>
-              <a:rPr lang="en-US" altLang="zh-TW" b="1" dirty="0" smtClean="0">
+              <a:rPr lang="en-US" altLang="zh-TW" b="1" dirty="0">
                 <a:solidFill>
                   <a:srgbClr val="000066"/>
                 </a:solidFill>
@@ -3563,7 +3513,7 @@
               <a:t> </a:t>
             </a:r>
             <a:r>
-              <a:rPr lang="en-US" altLang="zh-TW" b="1" dirty="0" err="1" smtClean="0">
+              <a:rPr lang="en-US" altLang="zh-TW" b="1" dirty="0" err="1">
                 <a:solidFill>
                   <a:srgbClr val="000066"/>
                 </a:solidFill>
@@ -3573,7 +3523,7 @@
               <a:t>trắng</a:t>
             </a:r>
             <a:r>
-              <a:rPr lang="en-US" altLang="zh-TW" b="1" dirty="0" smtClean="0">
+              <a:rPr lang="en-US" altLang="zh-TW" b="1" dirty="0">
                 <a:solidFill>
                   <a:srgbClr val="000066"/>
                 </a:solidFill>
@@ -3583,7 +3533,7 @@
               <a:t> </a:t>
             </a:r>
             <a:r>
-              <a:rPr lang="en-US" altLang="zh-TW" b="1" dirty="0" err="1" smtClean="0">
+              <a:rPr lang="en-US" altLang="zh-TW" b="1" dirty="0" err="1">
                 <a:solidFill>
                   <a:srgbClr val="000066"/>
                 </a:solidFill>
@@ -3592,7 +3542,7 @@
               </a:rPr>
               <a:t>trong</a:t>
             </a:r>
-            <a:endParaRPr lang="en-US" altLang="zh-TW" b="1" dirty="0" smtClean="0">
+            <a:endParaRPr lang="en-US" altLang="zh-TW" b="1" dirty="0">
               <a:solidFill>
                 <a:srgbClr val="000066"/>
               </a:solidFill>
@@ -3605,7 +3555,7 @@
               <a:buNone/>
             </a:pPr>
             <a:r>
-              <a:rPr lang="en-US" altLang="zh-TW" b="1" dirty="0" err="1" smtClean="0">
+              <a:rPr lang="en-US" altLang="zh-TW" b="1" dirty="0" err="1">
                 <a:solidFill>
                   <a:srgbClr val="000066"/>
                 </a:solidFill>
@@ -3615,7 +3565,7 @@
               <a:t>Cầu</a:t>
             </a:r>
             <a:r>
-              <a:rPr lang="en-US" altLang="zh-TW" b="1" dirty="0" smtClean="0">
+              <a:rPr lang="en-US" altLang="zh-TW" b="1" dirty="0">
                 <a:solidFill>
                   <a:srgbClr val="000066"/>
                 </a:solidFill>
@@ -3625,7 +3575,7 @@
               <a:t> </a:t>
             </a:r>
             <a:r>
-              <a:rPr lang="en-US" altLang="zh-TW" b="1" dirty="0" err="1" smtClean="0">
+              <a:rPr lang="en-US" altLang="zh-TW" b="1" dirty="0" err="1">
                 <a:solidFill>
                   <a:srgbClr val="000066"/>
                 </a:solidFill>
@@ -3635,7 +3585,7 @@
               <a:t>xin</a:t>
             </a:r>
             <a:r>
-              <a:rPr lang="en-US" altLang="zh-TW" b="1" dirty="0" smtClean="0">
+              <a:rPr lang="en-US" altLang="zh-TW" b="1" dirty="0">
                 <a:solidFill>
                   <a:srgbClr val="000066"/>
                 </a:solidFill>
@@ -3645,7 +3595,7 @@
               <a:t> </a:t>
             </a:r>
             <a:r>
-              <a:rPr lang="en-US" altLang="zh-TW" b="1" dirty="0" err="1" smtClean="0">
+              <a:rPr lang="en-US" altLang="zh-TW" b="1" dirty="0" err="1">
                 <a:solidFill>
                   <a:srgbClr val="000066"/>
                 </a:solidFill>
@@ -3655,7 +3605,7 @@
               <a:t>Chá</a:t>
             </a:r>
             <a:r>
-              <a:rPr lang="en-US" altLang="zh-TW" b="1" dirty="0" smtClean="0">
+              <a:rPr lang="en-US" altLang="zh-TW" b="1" dirty="0">
                 <a:solidFill>
                   <a:srgbClr val="000066"/>
                 </a:solidFill>
@@ -3665,7 +3615,7 @@
               <a:t> </a:t>
             </a:r>
             <a:r>
-              <a:rPr lang="en-US" altLang="zh-TW" b="1" dirty="0" err="1" smtClean="0">
+              <a:rPr lang="en-US" altLang="zh-TW" b="1" dirty="0" err="1">
                 <a:solidFill>
                   <a:srgbClr val="000066"/>
                 </a:solidFill>
@@ -3675,7 +3625,7 @@
               <a:t>đổi</a:t>
             </a:r>
             <a:r>
-              <a:rPr lang="en-US" altLang="zh-TW" b="1" dirty="0" smtClean="0">
+              <a:rPr lang="en-US" altLang="zh-TW" b="1" dirty="0">
                 <a:solidFill>
                   <a:srgbClr val="000066"/>
                 </a:solidFill>
@@ -3685,7 +3635,7 @@
               <a:t> </a:t>
             </a:r>
             <a:r>
-              <a:rPr lang="en-US" altLang="zh-TW" b="1" dirty="0" err="1" smtClean="0">
+              <a:rPr lang="en-US" altLang="zh-TW" b="1" dirty="0" err="1">
                 <a:solidFill>
                   <a:srgbClr val="000066"/>
                 </a:solidFill>
@@ -3695,7 +3645,7 @@
               <a:t>lòng</a:t>
             </a:r>
             <a:r>
-              <a:rPr lang="en-US" altLang="zh-TW" b="1" dirty="0" smtClean="0">
+              <a:rPr lang="en-US" altLang="zh-TW" b="1" dirty="0">
                 <a:solidFill>
                   <a:srgbClr val="000066"/>
                 </a:solidFill>
@@ -3705,7 +3655,7 @@
               <a:t> </a:t>
             </a:r>
             <a:r>
-              <a:rPr lang="en-US" altLang="zh-TW" b="1" dirty="0" err="1" smtClean="0">
+              <a:rPr lang="en-US" altLang="zh-TW" b="1" dirty="0" err="1">
                 <a:solidFill>
                   <a:srgbClr val="000066"/>
                 </a:solidFill>
@@ -3715,7 +3665,7 @@
               <a:t>khiến</a:t>
             </a:r>
             <a:r>
-              <a:rPr lang="en-US" altLang="zh-TW" b="1" dirty="0" smtClean="0">
+              <a:rPr lang="en-US" altLang="zh-TW" b="1" dirty="0">
                 <a:solidFill>
                   <a:srgbClr val="000066"/>
                 </a:solidFill>
@@ -3725,7 +3675,7 @@
               <a:t> con </a:t>
             </a:r>
             <a:r>
-              <a:rPr lang="en-US" altLang="zh-TW" b="1" dirty="0" err="1" smtClean="0">
+              <a:rPr lang="en-US" altLang="zh-TW" b="1" dirty="0" err="1">
                 <a:solidFill>
                   <a:srgbClr val="000066"/>
                 </a:solidFill>
@@ -3735,7 +3685,7 @@
               <a:t>nên</a:t>
             </a:r>
             <a:r>
-              <a:rPr lang="en-US" altLang="zh-TW" b="1" dirty="0" smtClean="0">
+              <a:rPr lang="en-US" altLang="zh-TW" b="1" dirty="0">
                 <a:solidFill>
                   <a:srgbClr val="000066"/>
                 </a:solidFill>
@@ -3745,7 +3695,7 @@
               <a:t> </a:t>
             </a:r>
             <a:r>
-              <a:rPr lang="en-US" altLang="zh-TW" b="1" dirty="0" err="1" smtClean="0">
+              <a:rPr lang="en-US" altLang="zh-TW" b="1" dirty="0" err="1">
                 <a:solidFill>
                   <a:srgbClr val="000066"/>
                 </a:solidFill>
@@ -3755,7 +3705,7 @@
               <a:t>giống</a:t>
             </a:r>
             <a:r>
-              <a:rPr lang="en-US" altLang="zh-TW" b="1" dirty="0" smtClean="0">
+              <a:rPr lang="en-US" altLang="zh-TW" b="1" dirty="0">
                 <a:solidFill>
                   <a:srgbClr val="000066"/>
                 </a:solidFill>
@@ -3765,7 +3715,7 @@
               <a:t> </a:t>
             </a:r>
             <a:r>
-              <a:rPr lang="en-US" altLang="zh-TW" b="1" dirty="0" err="1" smtClean="0">
+              <a:rPr lang="en-US" altLang="zh-TW" b="1" dirty="0" err="1">
                 <a:solidFill>
                   <a:srgbClr val="000066"/>
                 </a:solidFill>
@@ -3774,7 +3724,7 @@
               </a:rPr>
               <a:t>Ngài</a:t>
             </a:r>
-            <a:endParaRPr lang="en-US" altLang="zh-TW" b="1" dirty="0" smtClean="0">
+            <a:endParaRPr lang="en-US" altLang="zh-TW" b="1" dirty="0">
               <a:solidFill>
                 <a:srgbClr val="000066"/>
               </a:solidFill>
@@ -3787,7 +3737,7 @@
               <a:buNone/>
             </a:pPr>
             <a:r>
-              <a:rPr lang="en-US" altLang="zh-TW" b="1" dirty="0" err="1" smtClean="0">
+              <a:rPr lang="en-US" altLang="zh-TW" b="1" dirty="0" err="1">
                 <a:solidFill>
                   <a:srgbClr val="000066"/>
                 </a:solidFill>
@@ -3797,7 +3747,7 @@
               <a:t>Phận</a:t>
             </a:r>
             <a:r>
-              <a:rPr lang="en-US" altLang="zh-TW" b="1" dirty="0" smtClean="0">
+              <a:rPr lang="en-US" altLang="zh-TW" b="1" dirty="0">
                 <a:solidFill>
                   <a:srgbClr val="000066"/>
                 </a:solidFill>
@@ -3807,7 +3757,7 @@
               <a:t> con </a:t>
             </a:r>
             <a:r>
-              <a:rPr lang="en-US" altLang="zh-TW" b="1" dirty="0" err="1" smtClean="0">
+              <a:rPr lang="en-US" altLang="zh-TW" b="1" dirty="0" err="1">
                 <a:solidFill>
                   <a:srgbClr val="000066"/>
                 </a:solidFill>
@@ -3817,7 +3767,7 @@
               <a:t>đất</a:t>
             </a:r>
             <a:r>
-              <a:rPr lang="en-US" altLang="zh-TW" b="1" dirty="0" smtClean="0">
+              <a:rPr lang="en-US" altLang="zh-TW" b="1" dirty="0">
                 <a:solidFill>
                   <a:srgbClr val="000066"/>
                 </a:solidFill>
@@ -3827,7 +3777,7 @@
               <a:t> </a:t>
             </a:r>
             <a:r>
-              <a:rPr lang="en-US" altLang="zh-TW" b="1" dirty="0" err="1" smtClean="0">
+              <a:rPr lang="en-US" altLang="zh-TW" b="1" dirty="0" err="1">
                 <a:solidFill>
                   <a:srgbClr val="000066"/>
                 </a:solidFill>
@@ -3837,7 +3787,7 @@
               <a:t>sét</a:t>
             </a:r>
             <a:r>
-              <a:rPr lang="en-US" altLang="zh-TW" b="1" dirty="0" smtClean="0">
+              <a:rPr lang="en-US" altLang="zh-TW" b="1" dirty="0">
                 <a:solidFill>
                   <a:srgbClr val="000066"/>
                 </a:solidFill>
@@ -3847,7 +3797,7 @@
               <a:t> </a:t>
             </a:r>
             <a:r>
-              <a:rPr lang="en-US" altLang="zh-TW" b="1" dirty="0" err="1" smtClean="0">
+              <a:rPr lang="en-US" altLang="zh-TW" b="1" dirty="0" err="1">
                 <a:solidFill>
                   <a:srgbClr val="000066"/>
                 </a:solidFill>
@@ -3857,7 +3807,7 @@
               <a:t>đây</a:t>
             </a:r>
             <a:r>
-              <a:rPr lang="en-US" altLang="zh-TW" b="1" dirty="0" smtClean="0">
+              <a:rPr lang="en-US" altLang="zh-TW" b="1" dirty="0">
                 <a:solidFill>
                   <a:srgbClr val="000066"/>
                 </a:solidFill>
@@ -3867,7 +3817,7 @@
               <a:t> </a:t>
             </a:r>
             <a:r>
-              <a:rPr lang="en-US" altLang="zh-TW" b="1" dirty="0" err="1" smtClean="0">
+              <a:rPr lang="en-US" altLang="zh-TW" b="1" dirty="0" err="1">
                 <a:solidFill>
                   <a:srgbClr val="000066"/>
                 </a:solidFill>
@@ -3877,7 +3827,7 @@
               <a:t>nắn</a:t>
             </a:r>
             <a:r>
-              <a:rPr lang="en-US" altLang="zh-TW" b="1" dirty="0" smtClean="0">
+              <a:rPr lang="en-US" altLang="zh-TW" b="1" dirty="0">
                 <a:solidFill>
                   <a:srgbClr val="000066"/>
                 </a:solidFill>
@@ -3887,7 +3837,7 @@
               <a:t> </a:t>
             </a:r>
             <a:r>
-              <a:rPr lang="en-US" altLang="zh-TW" b="1" dirty="0" err="1" smtClean="0">
+              <a:rPr lang="en-US" altLang="zh-TW" b="1" dirty="0" err="1">
                 <a:solidFill>
                   <a:srgbClr val="000066"/>
                 </a:solidFill>
@@ -3897,7 +3847,7 @@
               <a:t>theo</a:t>
             </a:r>
             <a:r>
-              <a:rPr lang="en-US" altLang="zh-TW" b="1" dirty="0" smtClean="0">
+              <a:rPr lang="en-US" altLang="zh-TW" b="1" dirty="0">
                 <a:solidFill>
                   <a:srgbClr val="000066"/>
                 </a:solidFill>
@@ -3907,7 +3857,7 @@
               <a:t> ý </a:t>
             </a:r>
             <a:r>
-              <a:rPr lang="en-US" altLang="zh-TW" b="1" dirty="0" err="1" smtClean="0">
+              <a:rPr lang="en-US" altLang="zh-TW" b="1" dirty="0" err="1">
                 <a:solidFill>
                   <a:srgbClr val="000066"/>
                 </a:solidFill>
@@ -3916,7 +3866,7 @@
               </a:rPr>
               <a:t>Ngài</a:t>
             </a:r>
-            <a:endParaRPr lang="en-US" altLang="zh-TW" b="1" dirty="0" smtClean="0">
+            <a:endParaRPr lang="en-US" altLang="zh-TW" b="1" dirty="0">
               <a:solidFill>
                 <a:srgbClr val="000066"/>
               </a:solidFill>
@@ -3929,7 +3879,7 @@
               <a:buNone/>
             </a:pPr>
             <a:r>
-              <a:rPr lang="en-US" altLang="zh-TW" b="1" dirty="0" err="1" smtClean="0">
+              <a:rPr lang="en-US" altLang="zh-TW" b="1" dirty="0" err="1">
                 <a:solidFill>
                   <a:srgbClr val="000066"/>
                 </a:solidFill>
@@ -3939,7 +3889,7 @@
               <a:t>Nhờ</a:t>
             </a:r>
             <a:r>
-              <a:rPr lang="en-US" altLang="zh-TW" b="1" dirty="0" smtClean="0">
+              <a:rPr lang="en-US" altLang="zh-TW" b="1" dirty="0">
                 <a:solidFill>
                   <a:srgbClr val="000066"/>
                 </a:solidFill>
@@ -3949,7 +3899,7 @@
               <a:t> </a:t>
             </a:r>
             <a:r>
-              <a:rPr lang="en-US" altLang="zh-TW" b="1" dirty="0" err="1" smtClean="0">
+              <a:rPr lang="en-US" altLang="zh-TW" b="1" dirty="0" err="1">
                 <a:solidFill>
                   <a:srgbClr val="000066"/>
                 </a:solidFill>
@@ -3959,7 +3909,7 @@
               <a:t>Ngài</a:t>
             </a:r>
             <a:r>
-              <a:rPr lang="en-US" altLang="zh-TW" b="1" dirty="0" smtClean="0">
+              <a:rPr lang="en-US" altLang="zh-TW" b="1" dirty="0">
                 <a:solidFill>
                   <a:srgbClr val="000066"/>
                 </a:solidFill>
@@ -3969,7 +3919,7 @@
               <a:t> </a:t>
             </a:r>
             <a:r>
-              <a:rPr lang="en-US" altLang="zh-TW" b="1" dirty="0" err="1" smtClean="0">
+              <a:rPr lang="en-US" altLang="zh-TW" b="1" dirty="0" err="1">
                 <a:solidFill>
                   <a:srgbClr val="000066"/>
                 </a:solidFill>
@@ -3979,7 +3929,7 @@
               <a:t>khuôn</a:t>
             </a:r>
             <a:r>
-              <a:rPr lang="en-US" altLang="zh-TW" b="1" dirty="0" smtClean="0">
+              <a:rPr lang="en-US" altLang="zh-TW" b="1" dirty="0">
                 <a:solidFill>
                   <a:srgbClr val="000066"/>
                 </a:solidFill>
@@ -3989,7 +3939,7 @@
               <a:t> </a:t>
             </a:r>
             <a:r>
-              <a:rPr lang="en-US" altLang="zh-TW" b="1" dirty="0" err="1" smtClean="0">
+              <a:rPr lang="en-US" altLang="zh-TW" b="1" dirty="0" err="1">
                 <a:solidFill>
                   <a:srgbClr val="000066"/>
                 </a:solidFill>
@@ -3999,7 +3949,7 @@
               <a:t>đúc</a:t>
             </a:r>
             <a:r>
-              <a:rPr lang="en-US" altLang="zh-TW" b="1" dirty="0" smtClean="0">
+              <a:rPr lang="en-US" altLang="zh-TW" b="1" dirty="0">
                 <a:solidFill>
                   <a:srgbClr val="000066"/>
                 </a:solidFill>
@@ -4009,7 +3959,7 @@
               <a:t> con </a:t>
             </a:r>
             <a:r>
-              <a:rPr lang="en-US" altLang="zh-TW" b="1" dirty="0" err="1" smtClean="0">
+              <a:rPr lang="en-US" altLang="zh-TW" b="1" dirty="0" err="1">
                 <a:solidFill>
                   <a:srgbClr val="000066"/>
                 </a:solidFill>
@@ -4019,7 +3969,7 @@
               <a:t>Thánh</a:t>
             </a:r>
             <a:r>
-              <a:rPr lang="en-US" altLang="zh-TW" b="1" dirty="0" smtClean="0">
+              <a:rPr lang="en-US" altLang="zh-TW" b="1" dirty="0">
                 <a:solidFill>
                   <a:srgbClr val="000066"/>
                 </a:solidFill>
@@ -4029,7 +3979,7 @@
               <a:t> y Cha </a:t>
             </a:r>
             <a:r>
-              <a:rPr lang="en-US" altLang="zh-TW" b="1" dirty="0" err="1" smtClean="0">
+              <a:rPr lang="en-US" altLang="zh-TW" b="1" dirty="0" err="1">
                 <a:solidFill>
                   <a:srgbClr val="000066"/>
                 </a:solidFill>
@@ -4039,7 +3989,7 @@
               <a:t>được</a:t>
             </a:r>
             <a:r>
-              <a:rPr lang="en-US" altLang="zh-TW" b="1" dirty="0" smtClean="0">
+              <a:rPr lang="en-US" altLang="zh-TW" b="1" dirty="0">
                 <a:solidFill>
                   <a:srgbClr val="000066"/>
                 </a:solidFill>
@@ -4049,7 +3999,7 @@
               <a:t> </a:t>
             </a:r>
             <a:r>
-              <a:rPr lang="en-US" altLang="zh-TW" b="1" dirty="0" err="1" smtClean="0">
+              <a:rPr lang="en-US" altLang="zh-TW" b="1" dirty="0" err="1">
                 <a:solidFill>
                   <a:srgbClr val="000066"/>
                 </a:solidFill>
